--- a/Soutenance_RNCP38777_Bloc3_Fraude.pptx
+++ b/Soutenance_RNCP38777_Bloc3_Fraude.pptx
@@ -6134,7 +6134,7 @@
                 </a:solidFill>
                 <a:latin typeface="Calibri"/>
               </a:rPr>
-              <a:t>Pull API toutes les 6 sec</a:t>
+              <a:t>Pull API toutes les 3 sec</a:t>
             </a:r>
           </a:p>
         </p:txBody>
